--- a/public/fun/pack/pptx/familypro/가족소개프리미엄_22_아이와함께_네온아쿠아.pptx
+++ b/public/fun/pack/pptx/familypro/가족소개프리미엄_22_아이와함께_네온아쿠아.pptx
@@ -113,12 +113,12 @@
   <p:extLst>
     <p:ext uri="{521415D9-36F7-43E2-AB2F-B90AF26B5E84}">
       <p14:sectionLst xmlns:p14="http://schemas.microsoft.com/office/powerpoint/2010/main">
-        <p14:section name="시작" id="{C38DC161-915C-4D47-96A5-DE9C895F33CF}">
+        <p14:section name="시작" id="{BED7ECFB-CB0B-4B70-9431-A14BDEC38FDC}">
           <p14:sldIdLst>
             <p14:sldId id="256"/>
           </p14:sldIdLst>
         </p14:section>
-        <p14:section name="본문" id="{9D9E49DC-4778-4529-97FE-5768E8393EE3}">
+        <p14:section name="본문" id="{68EED803-5602-4F5B-A1C4-45982D7A1BB6}">
           <p14:sldIdLst>
             <p14:sldId id="257"/>
             <p14:sldId id="258"/>
@@ -127,7 +127,7 @@
             <p14:sldId id="261"/>
           </p14:sldIdLst>
         </p14:section>
-        <p14:section name="마무리" id="{7F184920-2ED4-43E6-B9B2-C379559E36D2}">
+        <p14:section name="마무리" id="{8F840245-FA02-4D01-8A9F-253FBE4364E9}">
           <p14:sldIdLst>
             <p14:sldId id="262"/>
           </p14:sldIdLst>
@@ -1601,7 +1601,7 @@
             </a:lvl1pPr>
           </a:lstStyle>
           <a:p>
-            <a:fld id="{716332DE-D0D6-4E2E-BBC9-BCF1D233B9D0}" type="slidenum">
+            <a:fld id="{401487A9-205A-4ED8-BC98-56824A080B01}" type="slidenum">
               <a:rPr lang="en-US"/>
               <a:t>‹#›</a:t>
             </a:fld>
@@ -2410,7 +2410,7 @@
             </a:lvl1pPr>
           </a:lstStyle>
           <a:p>
-            <a:fld id="{34812BA9-54AA-4304-B7C8-6300F55A558E}" type="slidenum">
+            <a:fld id="{2656B9FE-7183-493C-8931-4E32B369A243}" type="slidenum">
               <a:rPr lang="en-US"/>
               <a:t>‹#›</a:t>
             </a:fld>
@@ -3156,7 +3156,7 @@
             </a:lvl1pPr>
           </a:lstStyle>
           <a:p>
-            <a:fld id="{B7BC4876-753E-4EEE-9CFC-6D83BCCAA57E}" type="slidenum">
+            <a:fld id="{1819C69C-878A-4CF4-BEC7-7C86FE589E5C}" type="slidenum">
               <a:rPr lang="en-US"/>
               <a:t>‹#›</a:t>
             </a:fld>
@@ -4041,7 +4041,7 @@
           <a:p>
             <a:r>
               <a:rPr lang="ko-KR"/>
-              <a:t>아이와 함께 · 0000. 00. 00</a:t>
+              <a:t>아이와 함께 · 날짜 입력</a:t>
             </a:r>
           </a:p>
         </p:txBody>
@@ -4420,7 +4420,7 @@
           <a:bodyPr/>
           <a:lstStyle/>
           <a:p>
-            <a:fld id="{5DEF44D6-1F3A-470C-A190-247CD8B09F95}" type="slidenum">
+            <a:fld id="{2C5DF23D-7B76-4BB1-968F-BDEB1510CAC7}" type="slidenum">
               <a:rPr lang="en-US"/>
               <a:t>‹#›</a:t>
             </a:fld>
@@ -5158,7 +5158,7 @@
           <a:bodyPr/>
           <a:lstStyle/>
           <a:p>
-            <a:fld id="{E3E4B6FF-3A35-4DC1-8F32-3941B8AC606E}" type="slidenum">
+            <a:fld id="{B18C3E6D-7C1A-4751-916F-D745F55456E0}" type="slidenum">
               <a:rPr lang="en-US"/>
               <a:t>‹#›</a:t>
             </a:fld>
@@ -6155,7 +6155,7 @@
           <a:bodyPr/>
           <a:lstStyle/>
           <a:p>
-            <a:fld id="{B04AC566-28FE-4892-A4AB-A8388BF0CAB2}" type="slidenum">
+            <a:fld id="{FE499452-C113-4CF9-B4B9-8483B77A77BB}" type="slidenum">
               <a:rPr lang="en-US"/>
               <a:t>‹#›</a:t>
             </a:fld>
@@ -7453,7 +7453,7 @@
           <a:bodyPr/>
           <a:lstStyle/>
           <a:p>
-            <a:fld id="{BBEBD2C7-D9FB-42C0-93ED-5D21CB36C448}" type="slidenum">
+            <a:fld id="{6E9D01E6-3827-4904-A520-8F7F0C2CB87B}" type="slidenum">
               <a:rPr lang="en-US"/>
               <a:t>‹#›</a:t>
             </a:fld>
@@ -7563,7 +7563,7 @@
           <a:bodyPr/>
           <a:lstStyle/>
           <a:p>
-            <a:fld id="{F84F49EF-9903-4912-B417-EF39E40166A2}" type="slidenum">
+            <a:fld id="{9932C0F5-7DB1-4408-AADD-0FFEDC43781F}" type="slidenum">
               <a:rPr lang="en-US"/>
               <a:t>‹#›</a:t>
             </a:fld>
